--- a/assets/ppts/M1.2_Protocol_Layering.pptx
+++ b/assets/ppts/M1.2_Protocol_Layering.pptx
@@ -9,6 +9,7 @@
     <p:sldId id="257" r:id="rId8"/>
     <p:sldId id="258" r:id="rId9"/>
     <p:sldId id="259" r:id="rId10"/>
+    <p:sldId id="260" r:id="rId11"/>
   </p:sldIdLst>
   <p:sldSz cx="12191695" cy="6858000" type="screen4x3"/>
   <p:notesSz cx="6858000" cy="9144000"/>
@@ -3142,8 +3143,8 @@
         </p:nvSpPr>
         <p:spPr>
           <a:xfrm>
-            <a:off x="822960" y="1188720"/>
-            <a:ext cx="164592" cy="4480560"/>
+            <a:off x="0" y="0"/>
+            <a:ext cx="12191695" cy="137160"/>
           </a:xfrm>
           <a:prstGeom prst="rect">
             <a:avLst/>
@@ -3179,14 +3180,57 @@
       </p:sp>
       <p:sp>
         <p:nvSpPr>
-          <p:cNvPr id="4" name="TextBox 3"/>
+          <p:cNvPr id="4" name="Rectangle 3"/>
+          <p:cNvSpPr/>
+          <p:nvPr/>
+        </p:nvSpPr>
+        <p:spPr>
+          <a:xfrm>
+            <a:off x="822960" y="1097280"/>
+            <a:ext cx="164592" cy="4663440"/>
+          </a:xfrm>
+          <a:prstGeom prst="rect">
+            <a:avLst/>
+          </a:prstGeom>
+          <a:solidFill>
+            <a:srgbClr val="D97706"/>
+          </a:solidFill>
+          <a:ln>
+            <a:noFill/>
+          </a:ln>
+        </p:spPr>
+        <p:style>
+          <a:lnRef idx="1">
+            <a:schemeClr val="accent1"/>
+          </a:lnRef>
+          <a:fillRef idx="3">
+            <a:schemeClr val="accent1"/>
+          </a:fillRef>
+          <a:effectRef idx="2">
+            <a:schemeClr val="accent1"/>
+          </a:effectRef>
+          <a:fontRef idx="minor">
+            <a:schemeClr val="lt1"/>
+          </a:fontRef>
+        </p:style>
+        <p:txBody>
+          <a:bodyPr rtlCol="0" anchor="ctr"/>
+          <a:lstStyle/>
+          <a:p>
+            <a:pPr algn="ctr"/>
+          </a:p>
+        </p:txBody>
+      </p:sp>
+      <p:sp>
+        <p:nvSpPr>
+          <p:cNvPr id="5" name="TextBox 4"/>
           <p:cNvSpPr txBox="1"/>
           <p:nvPr/>
         </p:nvSpPr>
         <p:spPr>
           <a:xfrm>
-            <a:off x="1280160" y="1097280"/>
-            <a:ext cx="10058400" cy="4663440"/>
+            <a:off x="1234440" y="1005840"/>
+            <a:ext cx="10241280" cy="4846320"/>
           </a:xfrm>
           <a:prstGeom prst="rect">
             <a:avLst/>
@@ -3201,70 +3245,165 @@
           <a:p>
             <a:pPr>
               <a:spcAft>
+                <a:spcPts val="1000"/>
+              </a:spcAft>
+              <a:defRPr b="1" sz="1300">
+                <a:solidFill>
+                  <a:srgbClr val="D97706"/>
+                </a:solidFill>
+              </a:defRPr>
+            </a:pPr>
+            <a:r>
+              <a:t>PCCST501 Computer Networks | KTU 2024 Scheme • MODULE 1 • M1.2</a:t>
+            </a:r>
+          </a:p>
+          <a:p>
+            <a:pPr>
+              <a:spcAft>
                 <a:spcPts val="1200"/>
               </a:spcAft>
-              <a:defRPr b="1" sz="1300">
+              <a:defRPr b="1" sz="3000">
+                <a:solidFill>
+                  <a:srgbClr val="F8FAFC"/>
+                </a:solidFill>
+              </a:defRPr>
+            </a:pPr>
+            <a:r>
+              <a:t>Protocol Layering &amp; Network Models</a:t>
+            </a:r>
+          </a:p>
+          <a:p>
+            <a:pPr>
+              <a:spcAft>
+                <a:spcPts val="2400"/>
+              </a:spcAft>
+              <a:defRPr sz="1600">
+                <a:solidFill>
+                  <a:srgbClr val="94A3B8"/>
+                </a:solidFill>
+              </a:defRPr>
+            </a:pPr>
+            <a:r>
+              <a:t>Layering Principles, OSI 7-Layer Reference Model, TCP/IP 5-Layer Stack, PDU Encapsulation &amp; Addressing Hierarchy</a:t>
+            </a:r>
+          </a:p>
+          <a:p>
+            <a:pPr>
+              <a:spcAft>
+                <a:spcPts val="300"/>
+              </a:spcAft>
+              <a:defRPr b="1" sz="1350">
+                <a:solidFill>
+                  <a:srgbClr val="E2E8F0"/>
+                </a:solidFill>
+              </a:defRPr>
+            </a:pPr>
+            <a:r>
+              <a:t>Prepared by: Prof. Anju Markose | Assistant Professor, Dept. of CSE | VJCET</a:t>
+            </a:r>
+          </a:p>
+          <a:p>
+            <a:pPr>
+              <a:defRPr sz="1150">
+                <a:solidFill>
+                  <a:srgbClr val="94A3B8"/>
+                </a:solidFill>
+              </a:defRPr>
+            </a:pPr>
+            <a:r>
+              <a:t>Viswajyothi College of Engineering and Technology (VJCET), Vazhakulam • KTU S5 CSE</a:t>
+            </a:r>
+          </a:p>
+        </p:txBody>
+      </p:sp>
+      <p:sp>
+        <p:nvSpPr>
+          <p:cNvPr id="6" name="Rounded Rectangle 5"/>
+          <p:cNvSpPr/>
+          <p:nvPr/>
+        </p:nvSpPr>
+        <p:spPr>
+          <a:xfrm>
+            <a:off x="8412480" y="5120640"/>
+            <a:ext cx="3017520" cy="822960"/>
+          </a:xfrm>
+          <a:prstGeom prst="roundRect">
+            <a:avLst/>
+          </a:prstGeom>
+          <a:solidFill>
+            <a:srgbClr val="1E293B"/>
+          </a:solidFill>
+          <a:ln w="12700">
+            <a:solidFill>
+              <a:srgbClr val="0E7490"/>
+            </a:solidFill>
+          </a:ln>
+        </p:spPr>
+        <p:style>
+          <a:lnRef idx="1">
+            <a:schemeClr val="accent1"/>
+          </a:lnRef>
+          <a:fillRef idx="3">
+            <a:schemeClr val="accent1"/>
+          </a:fillRef>
+          <a:effectRef idx="2">
+            <a:schemeClr val="accent1"/>
+          </a:effectRef>
+          <a:fontRef idx="minor">
+            <a:schemeClr val="lt1"/>
+          </a:fontRef>
+        </p:style>
+        <p:txBody>
+          <a:bodyPr rtlCol="0" anchor="ctr"/>
+          <a:lstStyle/>
+          <a:p>
+            <a:pPr algn="ctr"/>
+          </a:p>
+        </p:txBody>
+      </p:sp>
+      <p:sp>
+        <p:nvSpPr>
+          <p:cNvPr id="7" name="TextBox 6"/>
+          <p:cNvSpPr txBox="1"/>
+          <p:nvPr/>
+        </p:nvSpPr>
+        <p:spPr>
+          <a:xfrm>
+            <a:off x="8503920" y="5166360"/>
+            <a:ext cx="2834640" cy="731520"/>
+          </a:xfrm>
+          <a:prstGeom prst="rect">
+            <a:avLst/>
+          </a:prstGeom>
+          <a:noFill/>
+        </p:spPr>
+        <p:txBody>
+          <a:bodyPr wrap="none">
+            <a:spAutoFit/>
+          </a:bodyPr>
+          <a:lstStyle/>
+          <a:p>
+            <a:pPr>
+              <a:defRPr b="1" sz="1050">
                 <a:solidFill>
                   <a:srgbClr val="D97706"/>
                 </a:solidFill>
               </a:defRPr>
             </a:pPr>
             <a:r>
-              <a:t>PCCST501 Computer Networks | KTU 2024 Scheme • MODULE 1 • M1.2</a:t>
-            </a:r>
-          </a:p>
-          <a:p>
-            <a:pPr>
-              <a:spcAft>
-                <a:spcPts val="1400"/>
-              </a:spcAft>
-              <a:defRPr b="1" sz="3200">
+              <a:t>KTU B.Tech Curriculum</a:t>
+            </a:r>
+          </a:p>
+          <a:p>
+            <a:pPr>
+              <a:defRPr sz="950">
                 <a:solidFill>
                   <a:srgbClr val="F8FAFC"/>
                 </a:solidFill>
               </a:defRPr>
             </a:pPr>
             <a:r>
-              <a:t>Protocol Layering &amp; Network Models</a:t>
-            </a:r>
-          </a:p>
-          <a:p>
-            <a:pPr>
-              <a:spcAft>
-                <a:spcPts val="2800"/>
-              </a:spcAft>
-              <a:defRPr sz="1700">
-                <a:solidFill>
-                  <a:srgbClr val="94A3B8"/>
-                </a:solidFill>
-              </a:defRPr>
-            </a:pPr>
-            <a:r>
-              <a:t>Layering Principles, OSI 7-Layer Architecture, TCP/IP 5-Layer Stack, Encapsulation &amp; PDUs</a:t>
-            </a:r>
-          </a:p>
-          <a:p>
-            <a:pPr>
-              <a:defRPr b="1" sz="1300">
-                <a:solidFill>
-                  <a:srgbClr val="E2E8F0"/>
-                </a:solidFill>
-              </a:defRPr>
-            </a:pPr>
-            <a:r>
-              <a:t>Prepared by: Prof. Anju Markose | Assistant Professor, Dept. of CSE | VJCET</a:t>
-            </a:r>
-          </a:p>
-          <a:p>
-            <a:pPr>
-              <a:defRPr sz="1100">
-                <a:solidFill>
-                  <a:srgbClr val="94A3B8"/>
-                </a:solidFill>
-              </a:defRPr>
-            </a:pPr>
-            <a:r>
-              <a:t>Viswajyothi College of Engineering and Technology (VJCET), Vazhakulam</a:t>
+              <a:t>Official Classroom Slide Deck</a:t>
             </a:r>
           </a:p>
         </p:txBody>
@@ -3396,14 +3535,14 @@
           <a:lstStyle/>
           <a:p>
             <a:pPr>
-              <a:defRPr b="1" sz="2300">
+              <a:defRPr b="1" sz="2200">
                 <a:solidFill>
                   <a:srgbClr val="F8FAFC"/>
                 </a:solidFill>
               </a:defRPr>
             </a:pPr>
             <a:r>
-              <a:t>1.2.1 Protocol Layering Principles</a:t>
+              <a:t>1.2.1 Principles of Layered Network Architecture</a:t>
             </a:r>
           </a:p>
         </p:txBody>
@@ -3451,7 +3590,7 @@
         </p:nvSpPr>
         <p:spPr>
           <a:xfrm>
-            <a:off x="731520" y="1280160"/>
+            <a:off x="731520" y="1234440"/>
             <a:ext cx="6858000" cy="4937760"/>
           </a:xfrm>
           <a:prstGeom prst="rect">
@@ -3469,29 +3608,29 @@
               <a:spcAft>
                 <a:spcPts val="200"/>
               </a:spcAft>
-              <a:defRPr b="1" sz="1500">
+              <a:defRPr b="1" sz="1450">
                 <a:solidFill>
                   <a:srgbClr val="0F1E4A"/>
                 </a:solidFill>
               </a:defRPr>
             </a:pPr>
             <a:r>
-              <a:t>• Modular Architecture</a:t>
+              <a:t>• Modularity &amp; Abstraction</a:t>
             </a:r>
           </a:p>
           <a:p>
             <a:pPr>
               <a:spcAft>
-                <a:spcPts val="800"/>
+                <a:spcPts val="700"/>
               </a:spcAft>
-              <a:defRPr sz="1300">
-                <a:solidFill>
-                  <a:srgbClr val="1E293B"/>
-                </a:solidFill>
-              </a:defRPr>
-            </a:pPr>
-            <a:r>
-              <a:t>   Complex networking tasks are divided into distinct functional layers. Each layer relies on services from the layer below and provides services to the layer above.</a:t>
+              <a:defRPr sz="1250">
+                <a:solidFill>
+                  <a:srgbClr val="0F172A"/>
+                </a:solidFill>
+              </a:defRPr>
+            </a:pPr>
+            <a:r>
+              <a:t>   Dividing the massive complexity of network communication into decoupled functional layers. Each layer provides well-defined services to the layer above.</a:t>
             </a:r>
           </a:p>
           <a:p>
@@ -3499,7 +3638,7 @@
               <a:spcAft>
                 <a:spcPts val="200"/>
               </a:spcAft>
-              <a:defRPr b="1" sz="1500">
+              <a:defRPr b="1" sz="1450">
                 <a:solidFill>
                   <a:srgbClr val="0F1E4A"/>
                 </a:solidFill>
@@ -3512,16 +3651,16 @@
           <a:p>
             <a:pPr>
               <a:spcAft>
-                <a:spcPts val="800"/>
+                <a:spcPts val="700"/>
               </a:spcAft>
-              <a:defRPr sz="1300">
-                <a:solidFill>
-                  <a:srgbClr val="1E293B"/>
-                </a:solidFill>
-              </a:defRPr>
-            </a:pPr>
-            <a:r>
-              <a:t>   Changes in the internal implementation of one layer do not affect other layers, provided the inter-layer interface remains unchanged.</a:t>
+              <a:defRPr sz="1250">
+                <a:solidFill>
+                  <a:srgbClr val="0F172A"/>
+                </a:solidFill>
+              </a:defRPr>
+            </a:pPr>
+            <a:r>
+              <a:t>   The internal implementation of a layer protocol can be completely modified or replaced without affecting adjacent layers as long as the layer interface remains unchanged.</a:t>
             </a:r>
           </a:p>
           <a:p>
@@ -3529,29 +3668,29 @@
               <a:spcAft>
                 <a:spcPts val="200"/>
               </a:spcAft>
-              <a:defRPr b="1" sz="1500">
+              <a:defRPr b="1" sz="1450">
                 <a:solidFill>
                   <a:srgbClr val="0F1E4A"/>
                 </a:solidFill>
               </a:defRPr>
             </a:pPr>
             <a:r>
-              <a:t>• Encapsulation &amp; Decapsulation</a:t>
+              <a:t>• Encapsulation at Sender</a:t>
             </a:r>
           </a:p>
           <a:p>
             <a:pPr>
               <a:spcAft>
-                <a:spcPts val="800"/>
+                <a:spcPts val="700"/>
               </a:spcAft>
-              <a:defRPr sz="1300">
-                <a:solidFill>
-                  <a:srgbClr val="1E293B"/>
-                </a:solidFill>
-              </a:defRPr>
-            </a:pPr>
-            <a:r>
-              <a:t>   As data travels down the stack at the sender, each layer prepends a header (and sometimes a trailer). At receiver, headers are stripped sequentially.</a:t>
+              <a:defRPr sz="1250">
+                <a:solidFill>
+                  <a:srgbClr val="0F172A"/>
+                </a:solidFill>
+              </a:defRPr>
+            </a:pPr>
+            <a:r>
+              <a:t>   Data moves top-down; each layer adds its own Protocol Header (and L2 adds a trailer) containing control metadata (addresses, sequence numbers, checksums).</a:t>
             </a:r>
           </a:p>
           <a:p>
@@ -3559,29 +3698,59 @@
               <a:spcAft>
                 <a:spcPts val="200"/>
               </a:spcAft>
-              <a:defRPr b="1" sz="1500">
+              <a:defRPr b="1" sz="1450">
                 <a:solidFill>
                   <a:srgbClr val="0F1E4A"/>
                 </a:solidFill>
               </a:defRPr>
             </a:pPr>
             <a:r>
-              <a:t>• Protocol Data Units (PDU)</a:t>
+              <a:t>• Decapsulation at Receiver</a:t>
             </a:r>
           </a:p>
           <a:p>
             <a:pPr>
               <a:spcAft>
-                <a:spcPts val="800"/>
+                <a:spcPts val="700"/>
               </a:spcAft>
-              <a:defRPr sz="1300">
-                <a:solidFill>
-                  <a:srgbClr val="1E293B"/>
-                </a:solidFill>
-              </a:defRPr>
-            </a:pPr>
-            <a:r>
-              <a:t>   L5: Message (App) $\to$ L4: Segment (TCP) / Datagram (UDP) $\to$ L3: Packet/Datagram (IP) $\to$ L2: Frame (Ethernet) $\to$ L1: Bits (Physical).</a:t>
+              <a:defRPr sz="1250">
+                <a:solidFill>
+                  <a:srgbClr val="0F172A"/>
+                </a:solidFill>
+              </a:defRPr>
+            </a:pPr>
+            <a:r>
+              <a:t>   Data moves bottom-up; each layer processes and strips its corresponding header, passing the demultiplexed payload to the upper layer.</a:t>
+            </a:r>
+          </a:p>
+          <a:p>
+            <a:pPr>
+              <a:spcAft>
+                <a:spcPts val="200"/>
+              </a:spcAft>
+              <a:defRPr b="1" sz="1450">
+                <a:solidFill>
+                  <a:srgbClr val="0F1E4A"/>
+                </a:solidFill>
+              </a:defRPr>
+            </a:pPr>
+            <a:r>
+              <a:t>• Protocol Data Unit (PDU) Terminology</a:t>
+            </a:r>
+          </a:p>
+          <a:p>
+            <a:pPr>
+              <a:spcAft>
+                <a:spcPts val="700"/>
+              </a:spcAft>
+              <a:defRPr sz="1250">
+                <a:solidFill>
+                  <a:srgbClr val="0F172A"/>
+                </a:solidFill>
+              </a:defRPr>
+            </a:pPr>
+            <a:r>
+              <a:t>   L5: Message (App) -&gt; L4: Segment (TCP) / Datagram (UDP) -&gt; L3: Packet / Datagram (IP) -&gt; L2: Frame (Ethernet/Wi-Fi) -&gt; L1: Raw Bit Stream.</a:t>
             </a:r>
           </a:p>
         </p:txBody>
@@ -3594,14 +3763,14 @@
         </p:nvSpPr>
         <p:spPr>
           <a:xfrm>
-            <a:off x="7955279" y="1280160"/>
-            <a:ext cx="3566160" cy="4846320"/>
+            <a:off x="7955279" y="1234440"/>
+            <a:ext cx="3566160" cy="4892040"/>
           </a:xfrm>
           <a:prstGeom prst="roundRect">
             <a:avLst/>
           </a:prstGeom>
           <a:solidFill>
-            <a:srgbClr val="F1F5F9"/>
+            <a:srgbClr val="F8FAFC"/>
           </a:solidFill>
           <a:ln w="19050">
             <a:solidFill>
@@ -3639,7 +3808,7 @@
         </p:nvSpPr>
         <p:spPr>
           <a:xfrm>
-            <a:off x="8138160" y="1417320"/>
+            <a:off x="8138160" y="1371600"/>
             <a:ext cx="3200400" cy="4572000"/>
           </a:xfrm>
           <a:prstGeom prst="rect">
@@ -3664,7 +3833,7 @@
               </a:defRPr>
             </a:pPr>
             <a:r>
-              <a:t>Key Advantages</a:t>
+              <a:t>Benefits of Layering</a:t>
             </a:r>
           </a:p>
           <a:p>
@@ -3674,12 +3843,12 @@
               </a:spcAft>
               <a:defRPr sz="1200">
                 <a:solidFill>
-                  <a:srgbClr val="1E293B"/>
-                </a:solidFill>
-              </a:defRPr>
-            </a:pPr>
-            <a:r>
-              <a:t>→ Modularity simplifies design</a:t>
+                  <a:srgbClr val="0F172A"/>
+                </a:solidFill>
+              </a:defRPr>
+            </a:pPr>
+            <a:r>
+              <a:t>→ Simplifies system design</a:t>
             </a:r>
           </a:p>
           <a:p>
@@ -3689,12 +3858,12 @@
               </a:spcAft>
               <a:defRPr sz="1200">
                 <a:solidFill>
-                  <a:srgbClr val="1E293B"/>
-                </a:solidFill>
-              </a:defRPr>
-            </a:pPr>
-            <a:r>
-              <a:t>→ Standardized interfaces</a:t>
+                  <a:srgbClr val="0F172A"/>
+                </a:solidFill>
+              </a:defRPr>
+            </a:pPr>
+            <a:r>
+              <a:t>→ Standardizes interfaces</a:t>
             </a:r>
           </a:p>
           <a:p>
@@ -3704,12 +3873,12 @@
               </a:spcAft>
               <a:defRPr sz="1200">
                 <a:solidFill>
-                  <a:srgbClr val="1E293B"/>
-                </a:solidFill>
-              </a:defRPr>
-            </a:pPr>
-            <a:r>
-              <a:t>→ Interoperability across vendors</a:t>
+                  <a:srgbClr val="0F172A"/>
+                </a:solidFill>
+              </a:defRPr>
+            </a:pPr>
+            <a:r>
+              <a:t>→ Enables multi-vendor hardware</a:t>
             </a:r>
           </a:p>
           <a:p>
@@ -3719,12 +3888,27 @@
               </a:spcAft>
               <a:defRPr sz="1200">
                 <a:solidFill>
-                  <a:srgbClr val="1E293B"/>
-                </a:solidFill>
-              </a:defRPr>
-            </a:pPr>
-            <a:r>
-              <a:t>→ Easy maintenance and upgrades</a:t>
+                  <a:srgbClr val="0F172A"/>
+                </a:solidFill>
+              </a:defRPr>
+            </a:pPr>
+            <a:r>
+              <a:t>→ Isolates layer troubleshooting</a:t>
+            </a:r>
+          </a:p>
+          <a:p>
+            <a:pPr>
+              <a:spcAft>
+                <a:spcPts val="600"/>
+              </a:spcAft>
+              <a:defRPr sz="1200">
+                <a:solidFill>
+                  <a:srgbClr val="0F172A"/>
+                </a:solidFill>
+              </a:defRPr>
+            </a:pPr>
+            <a:r>
+              <a:t>→ Facilitates protocol evolution</a:t>
             </a:r>
           </a:p>
         </p:txBody>
@@ -3737,8 +3921,8 @@
         </p:nvSpPr>
         <p:spPr>
           <a:xfrm>
-            <a:off x="731520" y="6309360"/>
-            <a:ext cx="10789920" cy="365760"/>
+            <a:off x="731520" y="6327648"/>
+            <a:ext cx="10789920" cy="320040"/>
           </a:xfrm>
           <a:prstGeom prst="rect">
             <a:avLst/>
@@ -3760,6 +3944,41 @@
             </a:pPr>
             <a:r>
               <a:t>PCCST501 Computer Networks | KTU 2024 Scheme | Prof. Anju Markose | Assistant Professor, Dept. of CSE | VJCET</a:t>
+            </a:r>
+          </a:p>
+        </p:txBody>
+      </p:sp>
+      <p:sp>
+        <p:nvSpPr>
+          <p:cNvPr id="10" name="TextBox 9"/>
+          <p:cNvSpPr txBox="1"/>
+          <p:nvPr/>
+        </p:nvSpPr>
+        <p:spPr>
+          <a:xfrm>
+            <a:off x="6858000" y="6327648"/>
+            <a:ext cx="4572000" cy="320040"/>
+          </a:xfrm>
+          <a:prstGeom prst="rect">
+            <a:avLst/>
+          </a:prstGeom>
+          <a:noFill/>
+        </p:spPr>
+        <p:txBody>
+          <a:bodyPr wrap="none">
+            <a:spAutoFit/>
+          </a:bodyPr>
+          <a:lstStyle/>
+          <a:p>
+            <a:pPr algn="r">
+              <a:defRPr sz="950">
+                <a:solidFill>
+                  <a:srgbClr val="64748B"/>
+                </a:solidFill>
+              </a:defRPr>
+            </a:pPr>
+            <a:r>
+              <a:t>Dept. of CSE, VJCET</a:t>
             </a:r>
           </a:p>
         </p:txBody>
@@ -3891,14 +4110,14 @@
           <a:lstStyle/>
           <a:p>
             <a:pPr>
-              <a:defRPr b="1" sz="2300">
+              <a:defRPr b="1" sz="2200">
                 <a:solidFill>
                   <a:srgbClr val="F8FAFC"/>
                 </a:solidFill>
               </a:defRPr>
             </a:pPr>
             <a:r>
-              <a:t>1.2.2 Model Comparison: OSI 7-Layer vs TCP/IP Stack</a:t>
+              <a:t>1.2.2 Comprehensive Architecture: OSI 7-Layer vs TCP/IP Stack</a:t>
             </a:r>
           </a:p>
         </p:txBody>
@@ -3946,18 +4165,18 @@
         </p:nvSpPr>
         <p:spPr>
           <a:xfrm>
-            <a:off x="731520" y="1280160"/>
-            <a:ext cx="5212080" cy="4846320"/>
+            <a:off x="731520" y="1234440"/>
+            <a:ext cx="5212080" cy="4892040"/>
           </a:xfrm>
           <a:prstGeom prst="roundRect">
             <a:avLst/>
           </a:prstGeom>
           <a:solidFill>
-            <a:srgbClr val="F1F5F9"/>
+            <a:srgbClr val="F8FAFC"/>
           </a:solidFill>
           <a:ln w="19050">
             <a:solidFill>
-              <a:srgbClr val="0E7490"/>
+              <a:srgbClr val="0F1E4A"/>
             </a:solidFill>
           </a:ln>
         </p:spPr>
@@ -3991,7 +4210,7 @@
         </p:nvSpPr>
         <p:spPr>
           <a:xfrm>
-            <a:off x="914400" y="1417320"/>
+            <a:off x="914400" y="1371600"/>
             <a:ext cx="4846320" cy="4572000"/>
           </a:xfrm>
           <a:prstGeom prst="rect">
@@ -4007,121 +4226,121 @@
           <a:p>
             <a:pPr>
               <a:spcAft>
-                <a:spcPts val="1200"/>
+                <a:spcPts val="1000"/>
               </a:spcAft>
-              <a:defRPr b="1" sz="1600">
+              <a:defRPr b="1" sz="1550">
                 <a:solidFill>
                   <a:srgbClr val="0F1E4A"/>
                 </a:solidFill>
               </a:defRPr>
             </a:pPr>
             <a:r>
-              <a:t>OSI Reference Model (ISO)</a:t>
+              <a:t>OSI 7-Layer Model (ISO Conceptual)</a:t>
             </a:r>
           </a:p>
           <a:p>
             <a:pPr>
               <a:spcAft>
-                <a:spcPts val="600"/>
+                <a:spcPts val="500"/>
               </a:spcAft>
-              <a:defRPr sz="1250">
-                <a:solidFill>
-                  <a:srgbClr val="1E293B"/>
-                </a:solidFill>
-              </a:defRPr>
-            </a:pPr>
-            <a:r>
-              <a:t>• 7. Application: User network interfaces (HTTP, FTP)</a:t>
+              <a:defRPr sz="1200">
+                <a:solidFill>
+                  <a:srgbClr val="0F172A"/>
+                </a:solidFill>
+              </a:defRPr>
+            </a:pPr>
+            <a:r>
+              <a:t>• 7. Application: User applications &amp; network services (HTTP, DNS)</a:t>
             </a:r>
           </a:p>
           <a:p>
             <a:pPr>
               <a:spcAft>
-                <a:spcPts val="600"/>
+                <a:spcPts val="500"/>
               </a:spcAft>
-              <a:defRPr sz="1250">
-                <a:solidFill>
-                  <a:srgbClr val="1E293B"/>
-                </a:solidFill>
-              </a:defRPr>
-            </a:pPr>
-            <a:r>
-              <a:t>• 6. Presentation: Data translation, compression, encryption</a:t>
+              <a:defRPr sz="1200">
+                <a:solidFill>
+                  <a:srgbClr val="0F172A"/>
+                </a:solidFill>
+              </a:defRPr>
+            </a:pPr>
+            <a:r>
+              <a:t>• 6. Presentation: Data formatting, compression, encryption/decryption</a:t>
             </a:r>
           </a:p>
           <a:p>
             <a:pPr>
               <a:spcAft>
-                <a:spcPts val="600"/>
+                <a:spcPts val="500"/>
               </a:spcAft>
-              <a:defRPr sz="1250">
-                <a:solidFill>
-                  <a:srgbClr val="1E293B"/>
-                </a:solidFill>
-              </a:defRPr>
-            </a:pPr>
-            <a:r>
-              <a:t>• 5. Session: Dialog control &amp; synchronization checkpoints</a:t>
+              <a:defRPr sz="1200">
+                <a:solidFill>
+                  <a:srgbClr val="0F172A"/>
+                </a:solidFill>
+              </a:defRPr>
+            </a:pPr>
+            <a:r>
+              <a:t>• 5. Session: Dialog management, token coordination, checkpoints</a:t>
             </a:r>
           </a:p>
           <a:p>
             <a:pPr>
               <a:spcAft>
-                <a:spcPts val="600"/>
+                <a:spcPts val="500"/>
               </a:spcAft>
-              <a:defRPr sz="1250">
-                <a:solidFill>
-                  <a:srgbClr val="1E293B"/>
-                </a:solidFill>
-              </a:defRPr>
-            </a:pPr>
-            <a:r>
-              <a:t>• 4. Transport: End-to-end process delivery &amp; flow/error control</a:t>
+              <a:defRPr sz="1200">
+                <a:solidFill>
+                  <a:srgbClr val="0F172A"/>
+                </a:solidFill>
+              </a:defRPr>
+            </a:pPr>
+            <a:r>
+              <a:t>• 4. Transport: End-to-end reliability, flow control, port addressing</a:t>
             </a:r>
           </a:p>
           <a:p>
             <a:pPr>
               <a:spcAft>
-                <a:spcPts val="600"/>
+                <a:spcPts val="500"/>
               </a:spcAft>
-              <a:defRPr sz="1250">
-                <a:solidFill>
-                  <a:srgbClr val="1E293B"/>
-                </a:solidFill>
-              </a:defRPr>
-            </a:pPr>
-            <a:r>
-              <a:t>• 3. Network: Routing &amp; logical addressing across networks</a:t>
+              <a:defRPr sz="1200">
+                <a:solidFill>
+                  <a:srgbClr val="0F172A"/>
+                </a:solidFill>
+              </a:defRPr>
+            </a:pPr>
+            <a:r>
+              <a:t>• 3. Network: Logical host addressing (IP) &amp; packet routing</a:t>
             </a:r>
           </a:p>
           <a:p>
             <a:pPr>
               <a:spcAft>
-                <a:spcPts val="600"/>
+                <a:spcPts val="500"/>
               </a:spcAft>
-              <a:defRPr sz="1250">
-                <a:solidFill>
-                  <a:srgbClr val="1E293B"/>
-                </a:solidFill>
-              </a:defRPr>
-            </a:pPr>
-            <a:r>
-              <a:t>• 2. Data Link: Node-to-node framing &amp; MAC error control</a:t>
+              <a:defRPr sz="1200">
+                <a:solidFill>
+                  <a:srgbClr val="0F172A"/>
+                </a:solidFill>
+              </a:defRPr>
+            </a:pPr>
+            <a:r>
+              <a:t>• 2. Data Link: Node-to-node frame transfer &amp; MAC error control</a:t>
             </a:r>
           </a:p>
           <a:p>
             <a:pPr>
               <a:spcAft>
-                <a:spcPts val="600"/>
+                <a:spcPts val="500"/>
               </a:spcAft>
-              <a:defRPr sz="1250">
-                <a:solidFill>
-                  <a:srgbClr val="1E293B"/>
-                </a:solidFill>
-              </a:defRPr>
-            </a:pPr>
-            <a:r>
-              <a:t>• 1. Physical: Bit stream transmission over raw media</a:t>
+              <a:defRPr sz="1200">
+                <a:solidFill>
+                  <a:srgbClr val="0F172A"/>
+                </a:solidFill>
+              </a:defRPr>
+            </a:pPr>
+            <a:r>
+              <a:t>• 1. Physical: Unstructured bit transmission over raw copper/fiber/air</a:t>
             </a:r>
           </a:p>
         </p:txBody>
@@ -4134,8 +4353,8 @@
         </p:nvSpPr>
         <p:spPr>
           <a:xfrm>
-            <a:off x="6309360" y="1280160"/>
-            <a:ext cx="5212080" cy="4846320"/>
+            <a:off x="6309360" y="1234440"/>
+            <a:ext cx="5212080" cy="4892040"/>
           </a:xfrm>
           <a:prstGeom prst="roundRect">
             <a:avLst/>
@@ -4145,7 +4364,7 @@
           </a:solidFill>
           <a:ln w="19050">
             <a:solidFill>
-              <a:srgbClr val="0F1E4A"/>
+              <a:srgbClr val="0E7490"/>
             </a:solidFill>
           </a:ln>
         </p:spPr>
@@ -4179,7 +4398,7 @@
         </p:nvSpPr>
         <p:spPr>
           <a:xfrm>
-            <a:off x="6492240" y="1417320"/>
+            <a:off x="6492240" y="1371600"/>
             <a:ext cx="4846320" cy="4572000"/>
           </a:xfrm>
           <a:prstGeom prst="rect">
@@ -4195,91 +4414,91 @@
           <a:p>
             <a:pPr>
               <a:spcAft>
-                <a:spcPts val="1200"/>
+                <a:spcPts val="1000"/>
               </a:spcAft>
-              <a:defRPr b="1" sz="1600">
+              <a:defRPr b="1" sz="1550">
                 <a:solidFill>
                   <a:srgbClr val="0E7490"/>
                 </a:solidFill>
               </a:defRPr>
             </a:pPr>
             <a:r>
-              <a:t>TCP/IP Internet Stack (Practical)</a:t>
+              <a:t>TCP/IP 5-Layer Internet Stack (Practical)</a:t>
             </a:r>
           </a:p>
           <a:p>
             <a:pPr>
               <a:spcAft>
-                <a:spcPts val="600"/>
+                <a:spcPts val="500"/>
               </a:spcAft>
-              <a:defRPr sz="1250">
-                <a:solidFill>
-                  <a:srgbClr val="1E293B"/>
-                </a:solidFill>
-              </a:defRPr>
-            </a:pPr>
-            <a:r>
-              <a:t>• 5. Application: Combines OSI L7, L6, and L5 functions</a:t>
+              <a:defRPr sz="1200">
+                <a:solidFill>
+                  <a:srgbClr val="0F172A"/>
+                </a:solidFill>
+              </a:defRPr>
+            </a:pPr>
+            <a:r>
+              <a:t>• 5. Application: Integrates OSI L7, L6, L5; protocols: HTTP, SMTP, DNS</a:t>
             </a:r>
           </a:p>
           <a:p>
             <a:pPr>
               <a:spcAft>
-                <a:spcPts val="600"/>
+                <a:spcPts val="500"/>
               </a:spcAft>
-              <a:defRPr sz="1250">
-                <a:solidFill>
-                  <a:srgbClr val="1E293B"/>
-                </a:solidFill>
-              </a:defRPr>
-            </a:pPr>
-            <a:r>
-              <a:t>• 4. Transport: Process-to-process delivery (TCP, UDP)</a:t>
+              <a:defRPr sz="1200">
+                <a:solidFill>
+                  <a:srgbClr val="0F172A"/>
+                </a:solidFill>
+              </a:defRPr>
+            </a:pPr>
+            <a:r>
+              <a:t>• 4. Transport: Process-to-process multiplexing: TCP (reliable) &amp; UDP</a:t>
             </a:r>
           </a:p>
           <a:p>
             <a:pPr>
               <a:spcAft>
-                <a:spcPts val="600"/>
+                <a:spcPts val="500"/>
               </a:spcAft>
-              <a:defRPr sz="1250">
-                <a:solidFill>
-                  <a:srgbClr val="1E293B"/>
-                </a:solidFill>
-              </a:defRPr>
-            </a:pPr>
-            <a:r>
-              <a:t>• 3. Network (Internet): Host-to-host routing (IPv4, IPv6, ICMP)</a:t>
+              <a:defRPr sz="1200">
+                <a:solidFill>
+                  <a:srgbClr val="0F172A"/>
+                </a:solidFill>
+              </a:defRPr>
+            </a:pPr>
+            <a:r>
+              <a:t>• 3. Network (Internet): Host-to-host delivery across networks: IPv4, IPv6, ICMP</a:t>
             </a:r>
           </a:p>
           <a:p>
             <a:pPr>
               <a:spcAft>
-                <a:spcPts val="600"/>
+                <a:spcPts val="500"/>
               </a:spcAft>
-              <a:defRPr sz="1250">
-                <a:solidFill>
-                  <a:srgbClr val="1E293B"/>
-                </a:solidFill>
-              </a:defRPr>
-            </a:pPr>
-            <a:r>
-              <a:t>• 2. Data Link: Hardware frame delivery (Ethernet, Wi-Fi)</a:t>
+              <a:defRPr sz="1200">
+                <a:solidFill>
+                  <a:srgbClr val="0F172A"/>
+                </a:solidFill>
+              </a:defRPr>
+            </a:pPr>
+            <a:r>
+              <a:t>• 2. Data Link: Hardware framing, MAC addressing: Ethernet, 802.11</a:t>
             </a:r>
           </a:p>
           <a:p>
             <a:pPr>
               <a:spcAft>
-                <a:spcPts val="600"/>
+                <a:spcPts val="500"/>
               </a:spcAft>
-              <a:defRPr sz="1250">
-                <a:solidFill>
-                  <a:srgbClr val="1E293B"/>
-                </a:solidFill>
-              </a:defRPr>
-            </a:pPr>
-            <a:r>
-              <a:t>• 1. Physical: Cable signals, optical pulses, radio waves</a:t>
+              <a:defRPr sz="1200">
+                <a:solidFill>
+                  <a:srgbClr val="0F172A"/>
+                </a:solidFill>
+              </a:defRPr>
+            </a:pPr>
+            <a:r>
+              <a:t>• 1. Physical: Signals, voltages, optical pulses, RF frequencies</a:t>
             </a:r>
           </a:p>
         </p:txBody>
@@ -4292,8 +4511,8 @@
         </p:nvSpPr>
         <p:spPr>
           <a:xfrm>
-            <a:off x="731520" y="6309360"/>
-            <a:ext cx="10789920" cy="365760"/>
+            <a:off x="731520" y="6327648"/>
+            <a:ext cx="10789920" cy="320040"/>
           </a:xfrm>
           <a:prstGeom prst="rect">
             <a:avLst/>
@@ -4315,6 +4534,41 @@
             </a:pPr>
             <a:r>
               <a:t>PCCST501 Computer Networks | KTU 2024 Scheme | Prof. Anju Markose | Assistant Professor, Dept. of CSE | VJCET</a:t>
+            </a:r>
+          </a:p>
+        </p:txBody>
+      </p:sp>
+      <p:sp>
+        <p:nvSpPr>
+          <p:cNvPr id="11" name="TextBox 10"/>
+          <p:cNvSpPr txBox="1"/>
+          <p:nvPr/>
+        </p:nvSpPr>
+        <p:spPr>
+          <a:xfrm>
+            <a:off x="6858000" y="6327648"/>
+            <a:ext cx="4572000" cy="320040"/>
+          </a:xfrm>
+          <a:prstGeom prst="rect">
+            <a:avLst/>
+          </a:prstGeom>
+          <a:noFill/>
+        </p:spPr>
+        <p:txBody>
+          <a:bodyPr wrap="none">
+            <a:spAutoFit/>
+          </a:bodyPr>
+          <a:lstStyle/>
+          <a:p>
+            <a:pPr algn="r">
+              <a:defRPr sz="950">
+                <a:solidFill>
+                  <a:srgbClr val="64748B"/>
+                </a:solidFill>
+              </a:defRPr>
+            </a:pPr>
+            <a:r>
+              <a:t>Dept. of CSE, VJCET</a:t>
             </a:r>
           </a:p>
         </p:txBody>
@@ -4446,14 +4700,14 @@
           <a:lstStyle/>
           <a:p>
             <a:pPr>
-              <a:defRPr b="1" sz="2300">
+              <a:defRPr b="1" sz="2200">
                 <a:solidFill>
                   <a:srgbClr val="F8FAFC"/>
                 </a:solidFill>
               </a:defRPr>
             </a:pPr>
             <a:r>
-              <a:t>1.2.3 PDU Encapsulation &amp; Addressing Hierarchy</a:t>
+              <a:t>1.2.3 Addressing Hierarchy &amp; PDU Encapsulation</a:t>
             </a:r>
           </a:p>
         </p:txBody>
@@ -4488,7 +4742,7 @@
               </a:defRPr>
             </a:pPr>
             <a:r>
-              <a:t>M1.2 ADDRESSING &amp; PDUs</a:t>
+              <a:t>M1.2 ADDRESSING HIERARCHY</a:t>
             </a:r>
           </a:p>
         </p:txBody>
@@ -4501,7 +4755,7 @@
         </p:nvSpPr>
         <p:spPr>
           <a:xfrm>
-            <a:off x="731520" y="1280160"/>
+            <a:off x="731520" y="1234440"/>
             <a:ext cx="6858000" cy="4937760"/>
           </a:xfrm>
           <a:prstGeom prst="rect">
@@ -4519,29 +4773,29 @@
               <a:spcAft>
                 <a:spcPts val="200"/>
               </a:spcAft>
-              <a:defRPr b="1" sz="1500">
+              <a:defRPr b="1" sz="1450">
                 <a:solidFill>
                   <a:srgbClr val="0F1E4A"/>
                 </a:solidFill>
               </a:defRPr>
             </a:pPr>
             <a:r>
-              <a:t>• Application Layer (L5)</a:t>
+              <a:t>• Application Layer Addressing</a:t>
             </a:r>
           </a:p>
           <a:p>
             <a:pPr>
               <a:spcAft>
-                <a:spcPts val="800"/>
+                <a:spcPts val="700"/>
               </a:spcAft>
-              <a:defRPr sz="1300">
-                <a:solidFill>
-                  <a:srgbClr val="1E293B"/>
-                </a:solidFill>
-              </a:defRPr>
-            </a:pPr>
-            <a:r>
-              <a:t>   PDU: Message. Uses Port Numbers (16-bit) and URLs/Hostnames to address application endpoints.</a:t>
+              <a:defRPr sz="1250">
+                <a:solidFill>
+                  <a:srgbClr val="0F172A"/>
+                </a:solidFill>
+              </a:defRPr>
+            </a:pPr>
+            <a:r>
+              <a:t>   Uniform Resource Identifiers (URIs), Domain Names (FQDNs), and standardized Port Numbers.</a:t>
             </a:r>
           </a:p>
           <a:p>
@@ -4549,29 +4803,29 @@
               <a:spcAft>
                 <a:spcPts val="200"/>
               </a:spcAft>
-              <a:defRPr b="1" sz="1500">
+              <a:defRPr b="1" sz="1450">
                 <a:solidFill>
                   <a:srgbClr val="0F1E4A"/>
                 </a:solidFill>
               </a:defRPr>
             </a:pPr>
             <a:r>
-              <a:t>• Transport Layer (L4)</a:t>
+              <a:t>• Transport Layer Addressing (Port Numbers)</a:t>
             </a:r>
           </a:p>
           <a:p>
             <a:pPr>
               <a:spcAft>
-                <a:spcPts val="800"/>
+                <a:spcPts val="700"/>
               </a:spcAft>
-              <a:defRPr sz="1300">
-                <a:solidFill>
-                  <a:srgbClr val="1E293B"/>
-                </a:solidFill>
-              </a:defRPr>
-            </a:pPr>
-            <a:r>
-              <a:t>   PDU: Segment / Datagram. Adds Source &amp; Destination Port Numbers (e.g., Port 80, 443, 53) for process-to-process multiplexing.</a:t>
+              <a:defRPr sz="1250">
+                <a:solidFill>
+                  <a:srgbClr val="0F172A"/>
+                </a:solidFill>
+              </a:defRPr>
+            </a:pPr>
+            <a:r>
+              <a:t>   16-bit Port Number (0 - 65,535). Well-known ports (0-1023: HTTP 80, HTTPS 443, SSH 22), Registered (1024-49151), Dynamic/Private (49152-65535).</a:t>
             </a:r>
           </a:p>
           <a:p>
@@ -4579,29 +4833,29 @@
               <a:spcAft>
                 <a:spcPts val="200"/>
               </a:spcAft>
-              <a:defRPr b="1" sz="1500">
+              <a:defRPr b="1" sz="1450">
                 <a:solidFill>
                   <a:srgbClr val="0F1E4A"/>
                 </a:solidFill>
               </a:defRPr>
             </a:pPr>
             <a:r>
-              <a:t>• Network Layer (L3)</a:t>
+              <a:t>• Network Layer Addressing (IP Addresses)</a:t>
             </a:r>
           </a:p>
           <a:p>
             <a:pPr>
               <a:spcAft>
-                <a:spcPts val="800"/>
+                <a:spcPts val="700"/>
               </a:spcAft>
-              <a:defRPr sz="1300">
-                <a:solidFill>
-                  <a:srgbClr val="1E293B"/>
-                </a:solidFill>
-              </a:defRPr>
-            </a:pPr>
-            <a:r>
-              <a:t>   PDU: Datagram / Packet. Adds Source &amp; Destination IP Addresses (32-bit IPv4 / 128-bit IPv6) for global host-to-host routing.</a:t>
+              <a:defRPr sz="1250">
+                <a:solidFill>
+                  <a:srgbClr val="0F172A"/>
+                </a:solidFill>
+              </a:defRPr>
+            </a:pPr>
+            <a:r>
+              <a:t>   Logical 32-bit IPv4 or 128-bit IPv6 address used for global routing across subnets and autonomous systems.</a:t>
             </a:r>
           </a:p>
           <a:p>
@@ -4609,29 +4863,29 @@
               <a:spcAft>
                 <a:spcPts val="200"/>
               </a:spcAft>
-              <a:defRPr b="1" sz="1500">
+              <a:defRPr b="1" sz="1450">
                 <a:solidFill>
                   <a:srgbClr val="0F1E4A"/>
                 </a:solidFill>
               </a:defRPr>
             </a:pPr>
             <a:r>
-              <a:t>• Data Link Layer (L2)</a:t>
+              <a:t>• Data Link Layer Addressing (MAC Addresses)</a:t>
             </a:r>
           </a:p>
           <a:p>
             <a:pPr>
               <a:spcAft>
-                <a:spcPts val="800"/>
+                <a:spcPts val="700"/>
               </a:spcAft>
-              <a:defRPr sz="1300">
-                <a:solidFill>
-                  <a:srgbClr val="1E293B"/>
-                </a:solidFill>
-              </a:defRPr>
-            </a:pPr>
-            <a:r>
-              <a:t>   PDU: Frame. Adds Source &amp; Destination MAC Addresses (48-bit physical) and CRC-32 Frame Check Sequence (FCS) trailer.</a:t>
+              <a:defRPr sz="1250">
+                <a:solidFill>
+                  <a:srgbClr val="0F172A"/>
+                </a:solidFill>
+              </a:defRPr>
+            </a:pPr>
+            <a:r>
+              <a:t>   Physical 48-bit (6-byte) EUI-48 hardware address burned into the NIC (e.g., `00:1A:2B:3C:4D:5E`). Used strictly on the local link.</a:t>
             </a:r>
           </a:p>
           <a:p>
@@ -4639,29 +4893,29 @@
               <a:spcAft>
                 <a:spcPts val="200"/>
               </a:spcAft>
-              <a:defRPr b="1" sz="1500">
+              <a:defRPr b="1" sz="1450">
                 <a:solidFill>
                   <a:srgbClr val="0F1E4A"/>
                 </a:solidFill>
               </a:defRPr>
             </a:pPr>
             <a:r>
-              <a:t>• Physical Layer (L1)</a:t>
+              <a:t>• Cross-Layer Demultiplexing</a:t>
             </a:r>
           </a:p>
           <a:p>
             <a:pPr>
               <a:spcAft>
-                <a:spcPts val="800"/>
+                <a:spcPts val="700"/>
               </a:spcAft>
-              <a:defRPr sz="1300">
-                <a:solidFill>
-                  <a:srgbClr val="1E293B"/>
-                </a:solidFill>
-              </a:defRPr>
-            </a:pPr>
-            <a:r>
-              <a:t>   PDU: Bits. Encodes raw bit stream into voltages, light pulses, or RF carrier modulations.</a:t>
+              <a:defRPr sz="1250">
+                <a:solidFill>
+                  <a:srgbClr val="0F172A"/>
+                </a:solidFill>
+              </a:defRPr>
+            </a:pPr>
+            <a:r>
+              <a:t>   L2 Frame Type field identifies L3 (IPv4 0x0800, ARP 0x0806) -&gt; L3 Protocol field identifies L4 (TCP 6, UDP 17) -&gt; L4 Port identifies L5 application.</a:t>
             </a:r>
           </a:p>
         </p:txBody>
@@ -4674,14 +4928,14 @@
         </p:nvSpPr>
         <p:spPr>
           <a:xfrm>
-            <a:off x="7955279" y="1280160"/>
-            <a:ext cx="3566160" cy="4846320"/>
+            <a:off x="7955279" y="1234440"/>
+            <a:ext cx="3566160" cy="4892040"/>
           </a:xfrm>
           <a:prstGeom prst="roundRect">
             <a:avLst/>
           </a:prstGeom>
           <a:solidFill>
-            <a:srgbClr val="F1F5F9"/>
+            <a:srgbClr val="F8FAFC"/>
           </a:solidFill>
           <a:ln w="19050">
             <a:solidFill>
@@ -4719,7 +4973,7 @@
         </p:nvSpPr>
         <p:spPr>
           <a:xfrm>
-            <a:off x="8138160" y="1417320"/>
+            <a:off x="8138160" y="1371600"/>
             <a:ext cx="3200400" cy="4572000"/>
           </a:xfrm>
           <a:prstGeom prst="rect">
@@ -4754,12 +5008,12 @@
               </a:spcAft>
               <a:defRPr sz="1200">
                 <a:solidFill>
-                  <a:srgbClr val="1E293B"/>
-                </a:solidFill>
-              </a:defRPr>
-            </a:pPr>
-            <a:r>
-              <a:t>→ L5/L4: 16-bit Port (0-65535)</a:t>
+                  <a:srgbClr val="0F172A"/>
+                </a:solidFill>
+              </a:defRPr>
+            </a:pPr>
+            <a:r>
+              <a:t>→ Process ID: 16-bit Port Number</a:t>
             </a:r>
           </a:p>
           <a:p>
@@ -4769,12 +5023,12 @@
               </a:spcAft>
               <a:defRPr sz="1200">
                 <a:solidFill>
-                  <a:srgbClr val="1E293B"/>
-                </a:solidFill>
-              </a:defRPr>
-            </a:pPr>
-            <a:r>
-              <a:t>→ L3: 32-bit IPv4 / 128-bit IPv6</a:t>
+                  <a:srgbClr val="0F172A"/>
+                </a:solidFill>
+              </a:defRPr>
+            </a:pPr>
+            <a:r>
+              <a:t>→ Host ID: 32-bit / 128-bit IP</a:t>
             </a:r>
           </a:p>
           <a:p>
@@ -4784,12 +5038,12 @@
               </a:spcAft>
               <a:defRPr sz="1200">
                 <a:solidFill>
-                  <a:srgbClr val="1E293B"/>
-                </a:solidFill>
-              </a:defRPr>
-            </a:pPr>
-            <a:r>
-              <a:t>→ L2: 48-bit MAC (Hex notation)</a:t>
+                  <a:srgbClr val="0F172A"/>
+                </a:solidFill>
+              </a:defRPr>
+            </a:pPr>
+            <a:r>
+              <a:t>→ NIC ID: 48-bit MAC Address</a:t>
             </a:r>
           </a:p>
           <a:p>
@@ -4799,12 +5053,42 @@
               </a:spcAft>
               <a:defRPr sz="1200">
                 <a:solidFill>
-                  <a:srgbClr val="1E293B"/>
-                </a:solidFill>
-              </a:defRPr>
-            </a:pPr>
-            <a:r>
-              <a:t>→ L1: Physical voltage/frequencies</a:t>
+                  <a:srgbClr val="0F172A"/>
+                </a:solidFill>
+              </a:defRPr>
+            </a:pPr>
+            <a:r>
+              <a:t>→ L2 Type 0x0800 -&gt; IPv4</a:t>
+            </a:r>
+          </a:p>
+          <a:p>
+            <a:pPr>
+              <a:spcAft>
+                <a:spcPts val="600"/>
+              </a:spcAft>
+              <a:defRPr sz="1200">
+                <a:solidFill>
+                  <a:srgbClr val="0F172A"/>
+                </a:solidFill>
+              </a:defRPr>
+            </a:pPr>
+            <a:r>
+              <a:t>→ L3 Protocol 6 -&gt; TCP</a:t>
+            </a:r>
+          </a:p>
+          <a:p>
+            <a:pPr>
+              <a:spcAft>
+                <a:spcPts val="600"/>
+              </a:spcAft>
+              <a:defRPr sz="1200">
+                <a:solidFill>
+                  <a:srgbClr val="0F172A"/>
+                </a:solidFill>
+              </a:defRPr>
+            </a:pPr>
+            <a:r>
+              <a:t>→ L3 Protocol 17 -&gt; UDP</a:t>
             </a:r>
           </a:p>
         </p:txBody>
@@ -4817,8 +5101,8 @@
         </p:nvSpPr>
         <p:spPr>
           <a:xfrm>
-            <a:off x="731520" y="6309360"/>
-            <a:ext cx="10789920" cy="365760"/>
+            <a:off x="731520" y="6327648"/>
+            <a:ext cx="10789920" cy="320040"/>
           </a:xfrm>
           <a:prstGeom prst="rect">
             <a:avLst/>
@@ -4840,6 +5124,541 @@
             </a:pPr>
             <a:r>
               <a:t>PCCST501 Computer Networks | KTU 2024 Scheme | Prof. Anju Markose | Assistant Professor, Dept. of CSE | VJCET</a:t>
+            </a:r>
+          </a:p>
+        </p:txBody>
+      </p:sp>
+      <p:sp>
+        <p:nvSpPr>
+          <p:cNvPr id="10" name="TextBox 9"/>
+          <p:cNvSpPr txBox="1"/>
+          <p:nvPr/>
+        </p:nvSpPr>
+        <p:spPr>
+          <a:xfrm>
+            <a:off x="6858000" y="6327648"/>
+            <a:ext cx="4572000" cy="320040"/>
+          </a:xfrm>
+          <a:prstGeom prst="rect">
+            <a:avLst/>
+          </a:prstGeom>
+          <a:noFill/>
+        </p:spPr>
+        <p:txBody>
+          <a:bodyPr wrap="none">
+            <a:spAutoFit/>
+          </a:bodyPr>
+          <a:lstStyle/>
+          <a:p>
+            <a:pPr algn="r">
+              <a:defRPr sz="950">
+                <a:solidFill>
+                  <a:srgbClr val="64748B"/>
+                </a:solidFill>
+              </a:defRPr>
+            </a:pPr>
+            <a:r>
+              <a:t>Dept. of CSE, VJCET</a:t>
+            </a:r>
+          </a:p>
+        </p:txBody>
+      </p:sp>
+    </p:spTree>
+  </p:cSld>
+  <p:clrMapOvr>
+    <a:masterClrMapping/>
+  </p:clrMapOvr>
+</p:sld>
+</file>
+
+<file path=ppt/slides/slide5.xml><?xml version="1.0" encoding="utf-8"?>
+<p:sld xmlns:a="http://schemas.openxmlformats.org/drawingml/2006/main" xmlns:p="http://schemas.openxmlformats.org/presentationml/2006/main" xmlns:r="http://schemas.openxmlformats.org/officeDocument/2006/relationships">
+  <p:cSld>
+    <p:spTree>
+      <p:nvGrpSpPr>
+        <p:cNvPr id="1" name=""/>
+        <p:cNvGrpSpPr/>
+        <p:nvPr/>
+      </p:nvGrpSpPr>
+      <p:grpSpPr/>
+      <p:sp>
+        <p:nvSpPr>
+          <p:cNvPr id="2" name="Rectangle 1"/>
+          <p:cNvSpPr/>
+          <p:nvPr/>
+        </p:nvSpPr>
+        <p:spPr>
+          <a:xfrm>
+            <a:off x="0" y="0"/>
+            <a:ext cx="12191695" cy="1005840"/>
+          </a:xfrm>
+          <a:prstGeom prst="rect">
+            <a:avLst/>
+          </a:prstGeom>
+          <a:solidFill>
+            <a:srgbClr val="0F1E4A"/>
+          </a:solidFill>
+          <a:ln>
+            <a:noFill/>
+          </a:ln>
+        </p:spPr>
+        <p:style>
+          <a:lnRef idx="1">
+            <a:schemeClr val="accent1"/>
+          </a:lnRef>
+          <a:fillRef idx="3">
+            <a:schemeClr val="accent1"/>
+          </a:fillRef>
+          <a:effectRef idx="2">
+            <a:schemeClr val="accent1"/>
+          </a:effectRef>
+          <a:fontRef idx="minor">
+            <a:schemeClr val="lt1"/>
+          </a:fontRef>
+        </p:style>
+        <p:txBody>
+          <a:bodyPr rtlCol="0" anchor="ctr"/>
+          <a:lstStyle/>
+          <a:p>
+            <a:pPr algn="ctr"/>
+          </a:p>
+        </p:txBody>
+      </p:sp>
+      <p:sp>
+        <p:nvSpPr>
+          <p:cNvPr id="3" name="Rectangle 2"/>
+          <p:cNvSpPr/>
+          <p:nvPr/>
+        </p:nvSpPr>
+        <p:spPr>
+          <a:xfrm>
+            <a:off x="0" y="969264"/>
+            <a:ext cx="12191695" cy="36576"/>
+          </a:xfrm>
+          <a:prstGeom prst="rect">
+            <a:avLst/>
+          </a:prstGeom>
+          <a:solidFill>
+            <a:srgbClr val="D97706"/>
+          </a:solidFill>
+          <a:ln>
+            <a:noFill/>
+          </a:ln>
+        </p:spPr>
+        <p:style>
+          <a:lnRef idx="1">
+            <a:schemeClr val="accent1"/>
+          </a:lnRef>
+          <a:fillRef idx="3">
+            <a:schemeClr val="accent1"/>
+          </a:fillRef>
+          <a:effectRef idx="2">
+            <a:schemeClr val="accent1"/>
+          </a:effectRef>
+          <a:fontRef idx="minor">
+            <a:schemeClr val="lt1"/>
+          </a:fontRef>
+        </p:style>
+        <p:txBody>
+          <a:bodyPr rtlCol="0" anchor="ctr"/>
+          <a:lstStyle/>
+          <a:p>
+            <a:pPr algn="ctr"/>
+          </a:p>
+        </p:txBody>
+      </p:sp>
+      <p:sp>
+        <p:nvSpPr>
+          <p:cNvPr id="4" name="TextBox 3"/>
+          <p:cNvSpPr txBox="1"/>
+          <p:nvPr/>
+        </p:nvSpPr>
+        <p:spPr>
+          <a:xfrm>
+            <a:off x="731520" y="164592"/>
+            <a:ext cx="8412480" cy="685800"/>
+          </a:xfrm>
+          <a:prstGeom prst="rect">
+            <a:avLst/>
+          </a:prstGeom>
+          <a:noFill/>
+        </p:spPr>
+        <p:txBody>
+          <a:bodyPr wrap="none">
+            <a:spAutoFit/>
+          </a:bodyPr>
+          <a:lstStyle/>
+          <a:p>
+            <a:pPr>
+              <a:defRPr b="1" sz="2100">
+                <a:solidFill>
+                  <a:srgbClr val="F8FAFC"/>
+                </a:solidFill>
+              </a:defRPr>
+            </a:pPr>
+            <a:r>
+              <a:t>🎯 Exam Booster &amp; Review: Protocol Layering &amp; Network Models</a:t>
+            </a:r>
+          </a:p>
+        </p:txBody>
+      </p:sp>
+      <p:sp>
+        <p:nvSpPr>
+          <p:cNvPr id="5" name="TextBox 4"/>
+          <p:cNvSpPr txBox="1"/>
+          <p:nvPr/>
+        </p:nvSpPr>
+        <p:spPr>
+          <a:xfrm>
+            <a:off x="8229600" y="164592"/>
+            <a:ext cx="3291840" cy="685800"/>
+          </a:xfrm>
+          <a:prstGeom prst="rect">
+            <a:avLst/>
+          </a:prstGeom>
+          <a:noFill/>
+        </p:spPr>
+        <p:txBody>
+          <a:bodyPr wrap="none">
+            <a:spAutoFit/>
+          </a:bodyPr>
+          <a:lstStyle/>
+          <a:p>
+            <a:pPr algn="r">
+              <a:defRPr b="1" sz="1300">
+                <a:solidFill>
+                  <a:srgbClr val="D97706"/>
+                </a:solidFill>
+              </a:defRPr>
+            </a:pPr>
+            <a:r>
+              <a:t>M1.2</a:t>
+            </a:r>
+          </a:p>
+        </p:txBody>
+      </p:sp>
+      <p:sp>
+        <p:nvSpPr>
+          <p:cNvPr id="6" name="Rounded Rectangle 5"/>
+          <p:cNvSpPr/>
+          <p:nvPr/>
+        </p:nvSpPr>
+        <p:spPr>
+          <a:xfrm>
+            <a:off x="731520" y="1234440"/>
+            <a:ext cx="5303520" cy="4892040"/>
+          </a:xfrm>
+          <a:prstGeom prst="roundRect">
+            <a:avLst/>
+          </a:prstGeom>
+          <a:solidFill>
+            <a:srgbClr val="FEF3C7"/>
+          </a:solidFill>
+          <a:ln w="19050">
+            <a:solidFill>
+              <a:srgbClr val="D97706"/>
+            </a:solidFill>
+          </a:ln>
+        </p:spPr>
+        <p:style>
+          <a:lnRef idx="1">
+            <a:schemeClr val="accent1"/>
+          </a:lnRef>
+          <a:fillRef idx="3">
+            <a:schemeClr val="accent1"/>
+          </a:fillRef>
+          <a:effectRef idx="2">
+            <a:schemeClr val="accent1"/>
+          </a:effectRef>
+          <a:fontRef idx="minor">
+            <a:schemeClr val="lt1"/>
+          </a:fontRef>
+        </p:style>
+        <p:txBody>
+          <a:bodyPr rtlCol="0" anchor="ctr"/>
+          <a:lstStyle/>
+          <a:p>
+            <a:pPr algn="ctr"/>
+          </a:p>
+        </p:txBody>
+      </p:sp>
+      <p:sp>
+        <p:nvSpPr>
+          <p:cNvPr id="7" name="TextBox 6"/>
+          <p:cNvSpPr txBox="1"/>
+          <p:nvPr/>
+        </p:nvSpPr>
+        <p:spPr>
+          <a:xfrm>
+            <a:off x="914400" y="1371600"/>
+            <a:ext cx="4937760" cy="4572000"/>
+          </a:xfrm>
+          <a:prstGeom prst="rect">
+            <a:avLst/>
+          </a:prstGeom>
+          <a:noFill/>
+        </p:spPr>
+        <p:txBody>
+          <a:bodyPr wrap="square">
+            <a:spAutoFit/>
+          </a:bodyPr>
+          <a:lstStyle/>
+          <a:p>
+            <a:pPr>
+              <a:spcAft>
+                <a:spcPts val="1000"/>
+              </a:spcAft>
+              <a:defRPr b="1" sz="1450">
+                <a:solidFill>
+                  <a:srgbClr val="D97706"/>
+                </a:solidFill>
+              </a:defRPr>
+            </a:pPr>
+            <a:r>
+              <a:t>📚 KTU High-Yield Questions (K2 Understand)</a:t>
+            </a:r>
+          </a:p>
+          <a:p>
+            <a:pPr>
+              <a:spcAft>
+                <a:spcPts val="700"/>
+              </a:spcAft>
+              <a:defRPr sz="1200">
+                <a:solidFill>
+                  <a:srgbClr val="0F172A"/>
+                </a:solidFill>
+              </a:defRPr>
+            </a:pPr>
+            <a:r>
+              <a:t>Q: Compare the OSI 7-Layer model with the TCP/IP 5-Layer stack. Explain why the Presentation and Session layers are merged in TCP/IP. (8 Marks)</a:t>
+            </a:r>
+          </a:p>
+          <a:p>
+            <a:pPr>
+              <a:spcAft>
+                <a:spcPts val="700"/>
+              </a:spcAft>
+              <a:defRPr sz="1200">
+                <a:solidFill>
+                  <a:srgbClr val="0F172A"/>
+                </a:solidFill>
+              </a:defRPr>
+            </a:pPr>
+            <a:r>
+              <a:t>Q: Illustrate the step-by-step PDU encapsulation and decapsulation process across all layers with a neat labeled diagram. (7 Marks)</a:t>
+            </a:r>
+          </a:p>
+          <a:p>
+            <a:pPr>
+              <a:spcAft>
+                <a:spcPts val="700"/>
+              </a:spcAft>
+              <a:defRPr sz="1200">
+                <a:solidFill>
+                  <a:srgbClr val="0F172A"/>
+                </a:solidFill>
+              </a:defRPr>
+            </a:pPr>
+            <a:r>
+              <a:t>Q: Explain the three-level addressing hierarchy (Port, IP, MAC) and describe how demultiplexing occurs at each layer. (6 Marks)</a:t>
+            </a:r>
+          </a:p>
+        </p:txBody>
+      </p:sp>
+      <p:sp>
+        <p:nvSpPr>
+          <p:cNvPr id="8" name="Rounded Rectangle 7"/>
+          <p:cNvSpPr/>
+          <p:nvPr/>
+        </p:nvSpPr>
+        <p:spPr>
+          <a:xfrm>
+            <a:off x="6309360" y="1234440"/>
+            <a:ext cx="5212080" cy="4892040"/>
+          </a:xfrm>
+          <a:prstGeom prst="roundRect">
+            <a:avLst/>
+          </a:prstGeom>
+          <a:solidFill>
+            <a:srgbClr val="EEF2FF"/>
+          </a:solidFill>
+          <a:ln w="19050">
+            <a:solidFill>
+              <a:srgbClr val="0E7490"/>
+            </a:solidFill>
+          </a:ln>
+        </p:spPr>
+        <p:style>
+          <a:lnRef idx="1">
+            <a:schemeClr val="accent1"/>
+          </a:lnRef>
+          <a:fillRef idx="3">
+            <a:schemeClr val="accent1"/>
+          </a:fillRef>
+          <a:effectRef idx="2">
+            <a:schemeClr val="accent1"/>
+          </a:effectRef>
+          <a:fontRef idx="minor">
+            <a:schemeClr val="lt1"/>
+          </a:fontRef>
+        </p:style>
+        <p:txBody>
+          <a:bodyPr rtlCol="0" anchor="ctr"/>
+          <a:lstStyle/>
+          <a:p>
+            <a:pPr algn="ctr"/>
+          </a:p>
+        </p:txBody>
+      </p:sp>
+      <p:sp>
+        <p:nvSpPr>
+          <p:cNvPr id="9" name="TextBox 8"/>
+          <p:cNvSpPr txBox="1"/>
+          <p:nvPr/>
+        </p:nvSpPr>
+        <p:spPr>
+          <a:xfrm>
+            <a:off x="6492240" y="1371600"/>
+            <a:ext cx="4846320" cy="4572000"/>
+          </a:xfrm>
+          <a:prstGeom prst="rect">
+            <a:avLst/>
+          </a:prstGeom>
+          <a:noFill/>
+        </p:spPr>
+        <p:txBody>
+          <a:bodyPr wrap="square">
+            <a:spAutoFit/>
+          </a:bodyPr>
+          <a:lstStyle/>
+          <a:p>
+            <a:pPr>
+              <a:spcAft>
+                <a:spcPts val="1000"/>
+              </a:spcAft>
+              <a:defRPr b="1" sz="1450">
+                <a:solidFill>
+                  <a:srgbClr val="0E7490"/>
+                </a:solidFill>
+              </a:defRPr>
+            </a:pPr>
+            <a:r>
+              <a:t>💡 Critical Conceptual Takeaways</a:t>
+            </a:r>
+          </a:p>
+          <a:p>
+            <a:pPr>
+              <a:spcAft>
+                <a:spcPts val="600"/>
+              </a:spcAft>
+              <a:defRPr sz="1200">
+                <a:solidFill>
+                  <a:srgbClr val="0F172A"/>
+                </a:solidFill>
+              </a:defRPr>
+            </a:pPr>
+            <a:r>
+              <a:t>✔ OSI is a conceptual model; TCP/IP is the practical architecture implemented across the Internet.</a:t>
+            </a:r>
+          </a:p>
+          <a:p>
+            <a:pPr>
+              <a:spcAft>
+                <a:spcPts val="600"/>
+              </a:spcAft>
+              <a:defRPr sz="1200">
+                <a:solidFill>
+                  <a:srgbClr val="0F172A"/>
+                </a:solidFill>
+              </a:defRPr>
+            </a:pPr>
+            <a:r>
+              <a:t>✔ Headers prepend metadata: Port at L4, IP at L3, MAC and CRC FCS trailer at L2.</a:t>
+            </a:r>
+          </a:p>
+          <a:p>
+            <a:pPr>
+              <a:spcAft>
+                <a:spcPts val="600"/>
+              </a:spcAft>
+              <a:defRPr sz="1200">
+                <a:solidFill>
+                  <a:srgbClr val="0F172A"/>
+                </a:solidFill>
+              </a:defRPr>
+            </a:pPr>
+            <a:r>
+              <a:t>✔ L2 MAC changes at every router hop; L3 Source and Destination IP remain unchanged end-to-end (without NAT).</a:t>
+            </a:r>
+          </a:p>
+        </p:txBody>
+      </p:sp>
+      <p:sp>
+        <p:nvSpPr>
+          <p:cNvPr id="10" name="TextBox 9"/>
+          <p:cNvSpPr txBox="1"/>
+          <p:nvPr/>
+        </p:nvSpPr>
+        <p:spPr>
+          <a:xfrm>
+            <a:off x="731520" y="6327648"/>
+            <a:ext cx="10789920" cy="320040"/>
+          </a:xfrm>
+          <a:prstGeom prst="rect">
+            <a:avLst/>
+          </a:prstGeom>
+          <a:noFill/>
+        </p:spPr>
+        <p:txBody>
+          <a:bodyPr wrap="none">
+            <a:spAutoFit/>
+          </a:bodyPr>
+          <a:lstStyle/>
+          <a:p>
+            <a:pPr>
+              <a:defRPr sz="950">
+                <a:solidFill>
+                  <a:srgbClr val="64748B"/>
+                </a:solidFill>
+              </a:defRPr>
+            </a:pPr>
+            <a:r>
+              <a:t>PCCST501 Computer Networks | KTU 2024 Scheme | Prof. Anju Markose | Assistant Professor, Dept. of CSE | VJCET</a:t>
+            </a:r>
+          </a:p>
+        </p:txBody>
+      </p:sp>
+      <p:sp>
+        <p:nvSpPr>
+          <p:cNvPr id="11" name="TextBox 10"/>
+          <p:cNvSpPr txBox="1"/>
+          <p:nvPr/>
+        </p:nvSpPr>
+        <p:spPr>
+          <a:xfrm>
+            <a:off x="6858000" y="6327648"/>
+            <a:ext cx="4572000" cy="320040"/>
+          </a:xfrm>
+          <a:prstGeom prst="rect">
+            <a:avLst/>
+          </a:prstGeom>
+          <a:noFill/>
+        </p:spPr>
+        <p:txBody>
+          <a:bodyPr wrap="none">
+            <a:spAutoFit/>
+          </a:bodyPr>
+          <a:lstStyle/>
+          <a:p>
+            <a:pPr algn="r">
+              <a:defRPr sz="950">
+                <a:solidFill>
+                  <a:srgbClr val="64748B"/>
+                </a:solidFill>
+              </a:defRPr>
+            </a:pPr>
+            <a:r>
+              <a:t>Dept. of CSE, VJCET</a:t>
             </a:r>
           </a:p>
         </p:txBody>
